--- a/AI_Assignment 2.pptx
+++ b/AI_Assignment 2.pptx
@@ -794,7 +794,7 @@
   <p:cSld>
     <p:spTree>
       <p:nvGrpSpPr>
-        <p:cNvPr id="56" name="Shape 56"/>
+        <p:cNvPr id="57" name="Shape 57"/>
         <p:cNvGrpSpPr/>
         <p:nvPr/>
       </p:nvGrpSpPr>
@@ -808,7 +808,7 @@
       </p:grpSpPr>
       <p:sp>
         <p:nvSpPr>
-          <p:cNvPr id="57" name="Google Shape;57;g351e45298c8_0_4:notes"/>
+          <p:cNvPr id="58" name="Google Shape;58;g351e45298c8_0_4:notes"/>
           <p:cNvSpPr/>
           <p:nvPr>
             <p:ph idx="2" type="sldImg"/>
@@ -843,7 +843,7 @@
       </p:sp>
       <p:sp>
         <p:nvSpPr>
-          <p:cNvPr id="58" name="Google Shape;58;g351e45298c8_0_4:notes"/>
+          <p:cNvPr id="59" name="Google Shape;59;g351e45298c8_0_4:notes"/>
           <p:cNvSpPr txBox="1"/>
           <p:nvPr>
             <p:ph idx="1" type="body"/>
@@ -893,7 +893,7 @@
   <p:cSld>
     <p:spTree>
       <p:nvGrpSpPr>
-        <p:cNvPr id="61" name="Shape 61"/>
+        <p:cNvPr id="62" name="Shape 62"/>
         <p:cNvGrpSpPr/>
         <p:nvPr/>
       </p:nvGrpSpPr>
@@ -907,7 +907,7 @@
       </p:grpSpPr>
       <p:sp>
         <p:nvSpPr>
-          <p:cNvPr id="62" name="Google Shape;62;g351e45298c8_0_0:notes"/>
+          <p:cNvPr id="63" name="Google Shape;63;g351e45298c8_0_0:notes"/>
           <p:cNvSpPr/>
           <p:nvPr>
             <p:ph idx="2" type="sldImg"/>
@@ -942,7 +942,7 @@
       </p:sp>
       <p:sp>
         <p:nvSpPr>
-          <p:cNvPr id="63" name="Google Shape;63;g351e45298c8_0_0:notes"/>
+          <p:cNvPr id="64" name="Google Shape;64;g351e45298c8_0_0:notes"/>
           <p:cNvSpPr txBox="1"/>
           <p:nvPr>
             <p:ph idx="1" type="body"/>
@@ -992,7 +992,7 @@
   <p:cSld>
     <p:spTree>
       <p:nvGrpSpPr>
-        <p:cNvPr id="66" name="Shape 66"/>
+        <p:cNvPr id="67" name="Shape 67"/>
         <p:cNvGrpSpPr/>
         <p:nvPr/>
       </p:nvGrpSpPr>
@@ -1006,7 +1006,7 @@
       </p:grpSpPr>
       <p:sp>
         <p:nvSpPr>
-          <p:cNvPr id="67" name="Google Shape;67;g351e45298c8_0_8:notes"/>
+          <p:cNvPr id="68" name="Google Shape;68;g351e45298c8_0_8:notes"/>
           <p:cNvSpPr/>
           <p:nvPr>
             <p:ph idx="2" type="sldImg"/>
@@ -1041,7 +1041,7 @@
       </p:sp>
       <p:sp>
         <p:nvSpPr>
-          <p:cNvPr id="68" name="Google Shape;68;g351e45298c8_0_8:notes"/>
+          <p:cNvPr id="69" name="Google Shape;69;g351e45298c8_0_8:notes"/>
           <p:cNvSpPr txBox="1"/>
           <p:nvPr>
             <p:ph idx="1" type="body"/>
@@ -1091,7 +1091,7 @@
   <p:cSld>
     <p:spTree>
       <p:nvGrpSpPr>
-        <p:cNvPr id="72" name="Shape 72"/>
+        <p:cNvPr id="73" name="Shape 73"/>
         <p:cNvGrpSpPr/>
         <p:nvPr/>
       </p:nvGrpSpPr>
@@ -1105,7 +1105,7 @@
       </p:grpSpPr>
       <p:sp>
         <p:nvSpPr>
-          <p:cNvPr id="73" name="Google Shape;73;g351e45298c8_0_12:notes"/>
+          <p:cNvPr id="74" name="Google Shape;74;g351e45298c8_0_12:notes"/>
           <p:cNvSpPr/>
           <p:nvPr>
             <p:ph idx="2" type="sldImg"/>
@@ -1140,7 +1140,7 @@
       </p:sp>
       <p:sp>
         <p:nvSpPr>
-          <p:cNvPr id="74" name="Google Shape;74;g351e45298c8_0_12:notes"/>
+          <p:cNvPr id="75" name="Google Shape;75;g351e45298c8_0_12:notes"/>
           <p:cNvSpPr txBox="1"/>
           <p:nvPr>
             <p:ph idx="1" type="body"/>
@@ -5900,7 +5900,7 @@
         <p:spPr>
           <a:xfrm>
             <a:off x="0" y="848050"/>
-            <a:ext cx="9144000" cy="3318600"/>
+            <a:ext cx="9144000" cy="4417500"/>
           </a:xfrm>
           <a:prstGeom prst="rect">
             <a:avLst/>
@@ -6006,13 +6006,6 @@
               </a:rPr>
               <a:t>Explores full game tree to find the optimal move by assuming opponent plays optimally.</a:t>
             </a:r>
-            <a:br>
-              <a:rPr lang="en" sz="1800">
-                <a:solidFill>
-                  <a:schemeClr val="dk1"/>
-                </a:solidFill>
-              </a:rPr>
-            </a:br>
             <a:endParaRPr sz="1800">
               <a:solidFill>
                 <a:schemeClr val="dk1"/>
@@ -6106,7 +6099,7 @@
                 <a:spcPts val="1200"/>
               </a:spcBef>
               <a:spcAft>
-                <a:spcPts val="1200"/>
+                <a:spcPts val="0"/>
               </a:spcAft>
               <a:buNone/>
             </a:pPr>
@@ -6132,8 +6125,107 @@
               </a:solidFill>
             </a:endParaRPr>
           </a:p>
+          <a:p>
+            <a:pPr indent="0" lvl="0" marL="0" rtl="0" algn="l">
+              <a:lnSpc>
+                <a:spcPct val="115000"/>
+              </a:lnSpc>
+              <a:spcBef>
+                <a:spcPts val="1200"/>
+              </a:spcBef>
+              <a:spcAft>
+                <a:spcPts val="0"/>
+              </a:spcAft>
+              <a:buNone/>
+            </a:pPr>
+            <a:r>
+              <a:rPr b="1" lang="en" sz="1800">
+                <a:solidFill>
+                  <a:schemeClr val="dk1"/>
+                </a:solidFill>
+              </a:rPr>
+              <a:t>Evaluation Function:</a:t>
+            </a:r>
+            <a:endParaRPr b="1" sz="1800">
+              <a:solidFill>
+                <a:schemeClr val="dk1"/>
+              </a:solidFill>
+            </a:endParaRPr>
+          </a:p>
+          <a:p>
+            <a:pPr indent="0" lvl="0" marL="0" rtl="0" algn="l">
+              <a:lnSpc>
+                <a:spcPct val="115000"/>
+              </a:lnSpc>
+              <a:spcBef>
+                <a:spcPts val="1200"/>
+              </a:spcBef>
+              <a:spcAft>
+                <a:spcPts val="0"/>
+              </a:spcAft>
+              <a:buNone/>
+            </a:pPr>
+            <a:r>
+              <a:t/>
+            </a:r>
+            <a:endParaRPr b="1" sz="1800">
+              <a:solidFill>
+                <a:schemeClr val="dk1"/>
+              </a:solidFill>
+            </a:endParaRPr>
+          </a:p>
+          <a:p>
+            <a:pPr indent="0" lvl="0" marL="0" rtl="0" algn="l">
+              <a:lnSpc>
+                <a:spcPct val="115000"/>
+              </a:lnSpc>
+              <a:spcBef>
+                <a:spcPts val="1200"/>
+              </a:spcBef>
+              <a:spcAft>
+                <a:spcPts val="1200"/>
+              </a:spcAft>
+              <a:buNone/>
+            </a:pPr>
+            <a:r>
+              <a:t/>
+            </a:r>
+            <a:endParaRPr b="1" sz="1800">
+              <a:solidFill>
+                <a:schemeClr val="dk1"/>
+              </a:solidFill>
+            </a:endParaRPr>
+          </a:p>
         </p:txBody>
       </p:sp>
+      <p:pic>
+        <p:nvPicPr>
+          <p:cNvPr id="56" name="Google Shape;56;p13"/>
+          <p:cNvPicPr preferRelativeResize="0"/>
+          <p:nvPr/>
+        </p:nvPicPr>
+        <p:blipFill>
+          <a:blip r:embed="rId3">
+            <a:alphaModFix/>
+          </a:blip>
+          <a:stretch>
+            <a:fillRect/>
+          </a:stretch>
+        </p:blipFill>
+        <p:spPr>
+          <a:xfrm>
+            <a:off x="2892525" y="4026548"/>
+            <a:ext cx="3586675" cy="818150"/>
+          </a:xfrm>
+          <a:prstGeom prst="rect">
+            <a:avLst/>
+          </a:prstGeom>
+          <a:noFill/>
+          <a:ln>
+            <a:noFill/>
+          </a:ln>
+        </p:spPr>
+      </p:pic>
     </p:spTree>
   </p:cSld>
   <p:clrMapOvr>
@@ -6147,7 +6239,7 @@
   <p:cSld>
     <p:spTree>
       <p:nvGrpSpPr>
-        <p:cNvPr id="59" name="Shape 59"/>
+        <p:cNvPr id="60" name="Shape 60"/>
         <p:cNvGrpSpPr/>
         <p:nvPr/>
       </p:nvGrpSpPr>
@@ -6161,14 +6253,14 @@
       </p:grpSpPr>
       <p:sp>
         <p:nvSpPr>
-          <p:cNvPr id="60" name="Google Shape;60;p14"/>
+          <p:cNvPr id="61" name="Google Shape;61;p14"/>
           <p:cNvSpPr txBox="1"/>
           <p:nvPr/>
         </p:nvSpPr>
         <p:spPr>
           <a:xfrm>
             <a:off x="0" y="0"/>
-            <a:ext cx="8672700" cy="5538300"/>
+            <a:ext cx="8672700" cy="5219400"/>
           </a:xfrm>
           <a:prstGeom prst="rect">
             <a:avLst/>
@@ -6229,7 +6321,15 @@
                   <a:schemeClr val="dk1"/>
                 </a:solidFill>
               </a:rPr>
-              <a:t>To assess non-terminal game states during Alpha-Beta Pruning, we implemented a </a:t>
+              <a:t>W</a:t>
+            </a:r>
+            <a:r>
+              <a:rPr lang="en" sz="1800">
+                <a:solidFill>
+                  <a:schemeClr val="dk1"/>
+                </a:solidFill>
+              </a:rPr>
+              <a:t>e implemented a </a:t>
             </a:r>
             <a:r>
               <a:rPr b="1" lang="en" sz="1800">
@@ -6377,7 +6477,7 @@
   <p:cSld>
     <p:spTree>
       <p:nvGrpSpPr>
-        <p:cNvPr id="64" name="Shape 64"/>
+        <p:cNvPr id="65" name="Shape 65"/>
         <p:cNvGrpSpPr/>
         <p:nvPr/>
       </p:nvGrpSpPr>
@@ -6391,7 +6491,7 @@
       </p:grpSpPr>
       <p:pic>
         <p:nvPicPr>
-          <p:cNvPr id="65" name="Google Shape;65;p15"/>
+          <p:cNvPr id="66" name="Google Shape;66;p15"/>
           <p:cNvPicPr preferRelativeResize="0"/>
           <p:nvPr/>
         </p:nvPicPr>
@@ -6430,7 +6530,7 @@
   <p:cSld>
     <p:spTree>
       <p:nvGrpSpPr>
-        <p:cNvPr id="69" name="Shape 69"/>
+        <p:cNvPr id="70" name="Shape 70"/>
         <p:cNvGrpSpPr/>
         <p:nvPr/>
       </p:nvGrpSpPr>
@@ -6444,7 +6544,7 @@
       </p:grpSpPr>
       <p:pic>
         <p:nvPicPr>
-          <p:cNvPr id="70" name="Google Shape;70;p16"/>
+          <p:cNvPr id="71" name="Google Shape;71;p16"/>
           <p:cNvPicPr preferRelativeResize="0"/>
           <p:nvPr/>
         </p:nvPicPr>
@@ -6472,7 +6572,7 @@
       </p:pic>
       <p:sp>
         <p:nvSpPr>
-          <p:cNvPr id="71" name="Google Shape;71;p16"/>
+          <p:cNvPr id="72" name="Google Shape;72;p16"/>
           <p:cNvSpPr txBox="1"/>
           <p:nvPr/>
         </p:nvSpPr>
@@ -6533,7 +6633,7 @@
   <p:cSld>
     <p:spTree>
       <p:nvGrpSpPr>
-        <p:cNvPr id="75" name="Shape 75"/>
+        <p:cNvPr id="76" name="Shape 76"/>
         <p:cNvGrpSpPr/>
         <p:nvPr/>
       </p:nvGrpSpPr>
@@ -6547,7 +6647,7 @@
       </p:grpSpPr>
       <p:sp>
         <p:nvSpPr>
-          <p:cNvPr id="76" name="Google Shape;76;p17"/>
+          <p:cNvPr id="77" name="Google Shape;77;p17"/>
           <p:cNvSpPr txBox="1"/>
           <p:nvPr/>
         </p:nvSpPr>
@@ -6761,7 +6861,7 @@
       </p:sp>
       <p:sp>
         <p:nvSpPr>
-          <p:cNvPr id="77" name="Google Shape;77;p17"/>
+          <p:cNvPr id="78" name="Google Shape;78;p17"/>
           <p:cNvSpPr txBox="1"/>
           <p:nvPr/>
         </p:nvSpPr>

--- a/AI_Assignment 2.pptx
+++ b/AI_Assignment 2.pptx
@@ -893,7 +893,7 @@
   <p:cSld>
     <p:spTree>
       <p:nvGrpSpPr>
-        <p:cNvPr id="62" name="Shape 62"/>
+        <p:cNvPr id="63" name="Shape 63"/>
         <p:cNvGrpSpPr/>
         <p:nvPr/>
       </p:nvGrpSpPr>
@@ -907,7 +907,7 @@
       </p:grpSpPr>
       <p:sp>
         <p:nvSpPr>
-          <p:cNvPr id="63" name="Google Shape;63;g351e45298c8_0_0:notes"/>
+          <p:cNvPr id="64" name="Google Shape;64;g351e45298c8_0_0:notes"/>
           <p:cNvSpPr/>
           <p:nvPr>
             <p:ph idx="2" type="sldImg"/>
@@ -942,7 +942,7 @@
       </p:sp>
       <p:sp>
         <p:nvSpPr>
-          <p:cNvPr id="64" name="Google Shape;64;g351e45298c8_0_0:notes"/>
+          <p:cNvPr id="65" name="Google Shape;65;g351e45298c8_0_0:notes"/>
           <p:cNvSpPr txBox="1"/>
           <p:nvPr>
             <p:ph idx="1" type="body"/>
@@ -992,7 +992,7 @@
   <p:cSld>
     <p:spTree>
       <p:nvGrpSpPr>
-        <p:cNvPr id="67" name="Shape 67"/>
+        <p:cNvPr id="68" name="Shape 68"/>
         <p:cNvGrpSpPr/>
         <p:nvPr/>
       </p:nvGrpSpPr>
@@ -1006,7 +1006,7 @@
       </p:grpSpPr>
       <p:sp>
         <p:nvSpPr>
-          <p:cNvPr id="68" name="Google Shape;68;g351e45298c8_0_8:notes"/>
+          <p:cNvPr id="69" name="Google Shape;69;g351e45298c8_0_8:notes"/>
           <p:cNvSpPr/>
           <p:nvPr>
             <p:ph idx="2" type="sldImg"/>
@@ -1041,7 +1041,7 @@
       </p:sp>
       <p:sp>
         <p:nvSpPr>
-          <p:cNvPr id="69" name="Google Shape;69;g351e45298c8_0_8:notes"/>
+          <p:cNvPr id="70" name="Google Shape;70;g351e45298c8_0_8:notes"/>
           <p:cNvSpPr txBox="1"/>
           <p:nvPr>
             <p:ph idx="1" type="body"/>
@@ -1091,7 +1091,7 @@
   <p:cSld>
     <p:spTree>
       <p:nvGrpSpPr>
-        <p:cNvPr id="73" name="Shape 73"/>
+        <p:cNvPr id="74" name="Shape 74"/>
         <p:cNvGrpSpPr/>
         <p:nvPr/>
       </p:nvGrpSpPr>
@@ -1105,7 +1105,7 @@
       </p:grpSpPr>
       <p:sp>
         <p:nvSpPr>
-          <p:cNvPr id="74" name="Google Shape;74;g351e45298c8_0_12:notes"/>
+          <p:cNvPr id="75" name="Google Shape;75;g351e45298c8_0_12:notes"/>
           <p:cNvSpPr/>
           <p:nvPr>
             <p:ph idx="2" type="sldImg"/>
@@ -1140,7 +1140,7 @@
       </p:sp>
       <p:sp>
         <p:nvSpPr>
-          <p:cNvPr id="75" name="Google Shape;75;g351e45298c8_0_12:notes"/>
+          <p:cNvPr id="76" name="Google Shape;76;g351e45298c8_0_12:notes"/>
           <p:cNvSpPr txBox="1"/>
           <p:nvPr>
             <p:ph idx="1" type="body"/>
@@ -5870,11 +5870,11 @@
         </p:spPr>
         <p:txBody>
           <a:bodyPr anchorCtr="0" anchor="ctr" bIns="91425" lIns="91425" spcFirstLastPara="1" rIns="91425" wrap="square" tIns="91425">
-            <a:normAutofit/>
+            <a:normAutofit fontScale="90000"/>
           </a:bodyPr>
           <a:lstStyle/>
           <a:p>
-            <a:pPr indent="0" lvl="0" marL="0" rtl="0" algn="ctr">
+            <a:pPr indent="0" lvl="0" marL="0" rtl="0" algn="l">
               <a:spcBef>
                 <a:spcPts val="0"/>
               </a:spcBef>
@@ -5885,9 +5885,20 @@
             </a:pPr>
             <a:r>
               <a:rPr lang="en"/>
-              <a:t>AI_ASSIGNMENT - 2</a:t>
+              <a:t>AI_ASSIGNMENT - 2          </a:t>
             </a:r>
-            <a:endParaRPr/>
+            <a:r>
+              <a:rPr lang="en" sz="1800"/>
+              <a:t>CS22B044 R.GREESHMA</a:t>
+            </a:r>
+            <a:br>
+              <a:rPr lang="en" sz="1800"/>
+            </a:br>
+            <a:r>
+              <a:rPr lang="en" sz="1800"/>
+              <a:t>                                                                                         CS22B041 P.Snehitha</a:t>
+            </a:r>
+            <a:endParaRPr sz="1800"/>
           </a:p>
         </p:txBody>
       </p:sp>
@@ -6260,7 +6271,7 @@
         <p:spPr>
           <a:xfrm>
             <a:off x="0" y="0"/>
-            <a:ext cx="8672700" cy="5219400"/>
+            <a:ext cx="8672700" cy="3472500"/>
           </a:xfrm>
           <a:prstGeom prst="rect">
             <a:avLst/>
@@ -6372,7 +6383,7 @@
                   <a:schemeClr val="dk1"/>
                 </a:solidFill>
               </a:rPr>
-              <a:t>Video links:</a:t>
+              <a:t>Video:</a:t>
             </a:r>
             <a:br>
               <a:rPr lang="en" sz="1800">
@@ -6381,59 +6392,6 @@
                 </a:solidFill>
               </a:rPr>
             </a:br>
-            <a:r>
-              <a:rPr lang="en" sz="1800">
-                <a:solidFill>
-                  <a:schemeClr val="dk1"/>
-                </a:solidFill>
-              </a:rPr>
-              <a:t>Minimax: </a:t>
-            </a:r>
-            <a:r>
-              <a:rPr lang="en" sz="1800" u="sng">
-                <a:solidFill>
-                  <a:schemeClr val="hlink"/>
-                </a:solidFill>
-                <a:hlinkClick r:id="rId3"/>
-              </a:rPr>
-              <a:t>https://drive.google.com/file/d/1HY7Uea-uBvhDnmUQZrmFmOfhv9rQfj3H/view?usp=sharing</a:t>
-            </a:r>
-            <a:endParaRPr sz="1800">
-              <a:solidFill>
-                <a:schemeClr val="dk1"/>
-              </a:solidFill>
-            </a:endParaRPr>
-          </a:p>
-          <a:p>
-            <a:pPr indent="0" lvl="0" marL="0" rtl="0" algn="l">
-              <a:lnSpc>
-                <a:spcPct val="115000"/>
-              </a:lnSpc>
-              <a:spcBef>
-                <a:spcPts val="1200"/>
-              </a:spcBef>
-              <a:spcAft>
-                <a:spcPts val="0"/>
-              </a:spcAft>
-              <a:buNone/>
-            </a:pPr>
-            <a:r>
-              <a:rPr lang="en" sz="1800">
-                <a:solidFill>
-                  <a:schemeClr val="dk1"/>
-                </a:solidFill>
-              </a:rPr>
-              <a:t>Alpha-Beta pruning: </a:t>
-            </a:r>
-            <a:r>
-              <a:rPr lang="en" sz="1800" u="sng">
-                <a:solidFill>
-                  <a:schemeClr val="hlink"/>
-                </a:solidFill>
-                <a:hlinkClick r:id="rId4"/>
-              </a:rPr>
-              <a:t>https://drive.google.com/file/d/1-qN58nDnJNN5Kgpx0Gx1UE3LY9X2rAVk/view?usp=sharing</a:t>
-            </a:r>
             <a:endParaRPr sz="1800">
               <a:solidFill>
                 <a:schemeClr val="dk1"/>
@@ -6464,11 +6422,124 @@
           </a:p>
         </p:txBody>
       </p:sp>
+      <p:pic>
+        <p:nvPicPr>
+          <p:cNvPr id="62" name="Google Shape;62;p14" title="minimax_chess.mp4">
+            <a:hlinkClick r:id="rId3"/>
+          </p:cNvPr>
+          <p:cNvPicPr preferRelativeResize="0"/>
+          <p:nvPr/>
+        </p:nvPicPr>
+        <p:blipFill>
+          <a:blip r:embed="rId4">
+            <a:alphaModFix/>
+          </a:blip>
+          <a:stretch>
+            <a:fillRect/>
+          </a:stretch>
+        </p:blipFill>
+        <p:spPr>
+          <a:xfrm>
+            <a:off x="1586425" y="2256700"/>
+            <a:ext cx="2763675" cy="2763675"/>
+          </a:xfrm>
+          <a:prstGeom prst="rect">
+            <a:avLst/>
+          </a:prstGeom>
+          <a:noFill/>
+          <a:ln>
+            <a:noFill/>
+          </a:ln>
+        </p:spPr>
+      </p:pic>
     </p:spTree>
   </p:cSld>
   <p:clrMapOvr>
     <a:masterClrMapping/>
   </p:clrMapOvr>
+  <p:timing>
+    <p:tnLst>
+      <p:par>
+        <p:cTn dur="indefinite" nodeType="tmRoot" restart="never">
+          <p:childTnLst>
+            <p:seq concurrent="1" nextAc="seek">
+              <p:cTn dur="indefinite" id="2" nodeType="mainSeq">
+                <p:childTnLst>
+                  <p:par>
+                    <p:cTn fill="hold">
+                      <p:stCondLst>
+                        <p:cond delay="indefinite"/>
+                      </p:stCondLst>
+                      <p:childTnLst>
+                        <p:par>
+                          <p:cTn fill="hold">
+                            <p:stCondLst>
+                              <p:cond delay="0"/>
+                            </p:stCondLst>
+                            <p:childTnLst>
+                              <p:par>
+                                <p:cTn fill="hold" nodeType="clickEffect" presetClass="entr" presetID="10" presetSubtype="0">
+                                  <p:stCondLst>
+                                    <p:cond delay="0"/>
+                                  </p:stCondLst>
+                                  <p:childTnLst>
+                                    <p:set>
+                                      <p:cBhvr>
+                                        <p:cTn dur="1" fill="hold">
+                                          <p:stCondLst>
+                                            <p:cond delay="0"/>
+                                          </p:stCondLst>
+                                        </p:cTn>
+                                        <p:tgtEl>
+                                          <p:spTgt spid="62"/>
+                                        </p:tgtEl>
+                                        <p:attrNameLst>
+                                          <p:attrName>style.visibility</p:attrName>
+                                        </p:attrNameLst>
+                                      </p:cBhvr>
+                                      <p:to>
+                                        <p:strVal val="visible"/>
+                                      </p:to>
+                                    </p:set>
+                                    <p:animEffect filter="fade" transition="in">
+                                      <p:cBhvr>
+                                        <p:cTn dur="1000"/>
+                                        <p:tgtEl>
+                                          <p:spTgt spid="62"/>
+                                        </p:tgtEl>
+                                      </p:cBhvr>
+                                    </p:animEffect>
+                                  </p:childTnLst>
+                                </p:cTn>
+                              </p:par>
+                            </p:childTnLst>
+                          </p:cTn>
+                        </p:par>
+                      </p:childTnLst>
+                    </p:cTn>
+                  </p:par>
+                </p:childTnLst>
+              </p:cTn>
+              <p:prevCondLst>
+                <p:cond evt="onPrev">
+                  <p:tgtEl>
+                    <p:sldTgt/>
+                  </p:tgtEl>
+                </p:cond>
+              </p:prevCondLst>
+              <p:nextCondLst>
+                <p:cond evt="onNext">
+                  <p:tgtEl>
+                    <p:sldTgt/>
+                  </p:tgtEl>
+                </p:cond>
+              </p:nextCondLst>
+            </p:seq>
+          </p:childTnLst>
+        </p:cTn>
+      </p:par>
+    </p:tnLst>
+  </p:timing>
 </p:sld>
 </file>
 
@@ -6477,7 +6548,7 @@
   <p:cSld>
     <p:spTree>
       <p:nvGrpSpPr>
-        <p:cNvPr id="65" name="Shape 65"/>
+        <p:cNvPr id="66" name="Shape 66"/>
         <p:cNvGrpSpPr/>
         <p:nvPr/>
       </p:nvGrpSpPr>
@@ -6491,7 +6562,7 @@
       </p:grpSpPr>
       <p:pic>
         <p:nvPicPr>
-          <p:cNvPr id="66" name="Google Shape;66;p15"/>
+          <p:cNvPr id="67" name="Google Shape;67;p15"/>
           <p:cNvPicPr preferRelativeResize="0"/>
           <p:nvPr/>
         </p:nvPicPr>
@@ -6530,7 +6601,7 @@
   <p:cSld>
     <p:spTree>
       <p:nvGrpSpPr>
-        <p:cNvPr id="70" name="Shape 70"/>
+        <p:cNvPr id="71" name="Shape 71"/>
         <p:cNvGrpSpPr/>
         <p:nvPr/>
       </p:nvGrpSpPr>
@@ -6544,7 +6615,7 @@
       </p:grpSpPr>
       <p:pic>
         <p:nvPicPr>
-          <p:cNvPr id="71" name="Google Shape;71;p16"/>
+          <p:cNvPr id="72" name="Google Shape;72;p16"/>
           <p:cNvPicPr preferRelativeResize="0"/>
           <p:nvPr/>
         </p:nvPicPr>
@@ -6572,7 +6643,7 @@
       </p:pic>
       <p:sp>
         <p:nvSpPr>
-          <p:cNvPr id="72" name="Google Shape;72;p16"/>
+          <p:cNvPr id="73" name="Google Shape;73;p16"/>
           <p:cNvSpPr txBox="1"/>
           <p:nvPr/>
         </p:nvSpPr>
@@ -6633,7 +6704,7 @@
   <p:cSld>
     <p:spTree>
       <p:nvGrpSpPr>
-        <p:cNvPr id="76" name="Shape 76"/>
+        <p:cNvPr id="77" name="Shape 77"/>
         <p:cNvGrpSpPr/>
         <p:nvPr/>
       </p:nvGrpSpPr>
@@ -6647,7 +6718,7 @@
       </p:grpSpPr>
       <p:sp>
         <p:nvSpPr>
-          <p:cNvPr id="77" name="Google Shape;77;p17"/>
+          <p:cNvPr id="78" name="Google Shape;78;p17"/>
           <p:cNvSpPr txBox="1"/>
           <p:nvPr/>
         </p:nvSpPr>
@@ -6861,7 +6932,7 @@
       </p:sp>
       <p:sp>
         <p:nvSpPr>
-          <p:cNvPr id="78" name="Google Shape;78;p17"/>
+          <p:cNvPr id="79" name="Google Shape;79;p17"/>
           <p:cNvSpPr txBox="1"/>
           <p:nvPr/>
         </p:nvSpPr>
